--- a/docs/Formato Ponencias TecBioTec.pptx
+++ b/docs/Formato Ponencias TecBioTec.pptx
@@ -207,7 +207,7 @@
           <a:p>
             <a:fld id="{7BB33A8D-271C-4D3A-ABFD-0D8229291E73}" type="datetimeFigureOut">
               <a:rPr lang="LID4096" smtClean="0"/>
-              <a:t>03/20/2026</a:t>
+              <a:t>04/13/2026</a:t>
             </a:fld>
             <a:endParaRPr lang="LID4096"/>
           </a:p>
@@ -624,7 +624,7 @@
           <a:p>
             <a:fld id="{0524CB34-55FD-4B56-A935-4557A37DA214}" type="datetime1">
               <a:rPr lang="LID4096" smtClean="0"/>
-              <a:t>03/20/2026</a:t>
+              <a:t>04/13/2026</a:t>
             </a:fld>
             <a:endParaRPr lang="LID4096"/>
           </a:p>
@@ -824,7 +824,7 @@
           <a:p>
             <a:fld id="{2937A129-CF64-4450-8461-BBCDF612F4AD}" type="datetime1">
               <a:rPr lang="LID4096" smtClean="0"/>
-              <a:t>03/20/2026</a:t>
+              <a:t>04/13/2026</a:t>
             </a:fld>
             <a:endParaRPr lang="LID4096"/>
           </a:p>
@@ -1034,7 +1034,7 @@
           <a:p>
             <a:fld id="{B7DE4012-3CBB-402B-BFDC-C1D1B3197D48}" type="datetime1">
               <a:rPr lang="LID4096" smtClean="0"/>
-              <a:t>03/20/2026</a:t>
+              <a:t>04/13/2026</a:t>
             </a:fld>
             <a:endParaRPr lang="LID4096"/>
           </a:p>
@@ -1234,7 +1234,7 @@
           <a:p>
             <a:fld id="{8B7D027F-154F-462F-A67B-B52B6509D686}" type="datetime1">
               <a:rPr lang="LID4096" smtClean="0"/>
-              <a:t>03/20/2026</a:t>
+              <a:t>04/13/2026</a:t>
             </a:fld>
             <a:endParaRPr lang="LID4096"/>
           </a:p>
@@ -1510,7 +1510,7 @@
           <a:p>
             <a:fld id="{1DB7907E-DE4E-4626-8199-C6FDB7EB835B}" type="datetime1">
               <a:rPr lang="LID4096" smtClean="0"/>
-              <a:t>03/20/2026</a:t>
+              <a:t>04/13/2026</a:t>
             </a:fld>
             <a:endParaRPr lang="LID4096"/>
           </a:p>
@@ -1778,7 +1778,7 @@
           <a:p>
             <a:fld id="{DC0ACDAB-FCDB-4DBA-9083-63C7B3979D12}" type="datetime1">
               <a:rPr lang="LID4096" smtClean="0"/>
-              <a:t>03/20/2026</a:t>
+              <a:t>04/13/2026</a:t>
             </a:fld>
             <a:endParaRPr lang="LID4096"/>
           </a:p>
@@ -2193,7 +2193,7 @@
           <a:p>
             <a:fld id="{ED59BF54-07BC-4938-933E-8E1B458ABC86}" type="datetime1">
               <a:rPr lang="LID4096" smtClean="0"/>
-              <a:t>03/20/2026</a:t>
+              <a:t>04/13/2026</a:t>
             </a:fld>
             <a:endParaRPr lang="LID4096"/>
           </a:p>
@@ -2335,7 +2335,7 @@
           <a:p>
             <a:fld id="{ADCD4010-1B77-47EF-B52B-8007438BEE84}" type="datetime1">
               <a:rPr lang="LID4096" smtClean="0"/>
-              <a:t>03/20/2026</a:t>
+              <a:t>04/13/2026</a:t>
             </a:fld>
             <a:endParaRPr lang="LID4096"/>
           </a:p>
@@ -2448,7 +2448,7 @@
           <a:p>
             <a:fld id="{A10B191E-77A8-4F66-9F14-F632E90B03EC}" type="datetime1">
               <a:rPr lang="LID4096" smtClean="0"/>
-              <a:t>03/20/2026</a:t>
+              <a:t>04/13/2026</a:t>
             </a:fld>
             <a:endParaRPr lang="LID4096"/>
           </a:p>
@@ -2761,7 +2761,7 @@
           <a:p>
             <a:fld id="{FFE2017F-EFAE-4654-ADE6-B1AC18B06322}" type="datetime1">
               <a:rPr lang="LID4096" smtClean="0"/>
-              <a:t>03/20/2026</a:t>
+              <a:t>04/13/2026</a:t>
             </a:fld>
             <a:endParaRPr lang="LID4096"/>
           </a:p>
@@ -3050,7 +3050,7 @@
           <a:p>
             <a:fld id="{66EF501C-A945-4A5C-9034-DEF2D29C87F9}" type="datetime1">
               <a:rPr lang="LID4096" smtClean="0"/>
-              <a:t>03/20/2026</a:t>
+              <a:t>04/13/2026</a:t>
             </a:fld>
             <a:endParaRPr lang="LID4096"/>
           </a:p>
@@ -3293,7 +3293,7 @@
           <a:p>
             <a:fld id="{55485D26-83A6-43C0-996D-6FD81B16CF28}" type="datetime1">
               <a:rPr lang="LID4096" smtClean="0"/>
-              <a:t>03/20/2026</a:t>
+              <a:t>04/13/2026</a:t>
             </a:fld>
             <a:endParaRPr lang="LID4096"/>
           </a:p>
@@ -3713,10 +3713,10 @@
       </p:grpSpPr>
       <p:pic>
         <p:nvPicPr>
-          <p:cNvPr id="20" name="Imagen 19">
-            <a:extLst>
-              <a:ext uri="{FF2B5EF4-FFF2-40B4-BE49-F238E27FC236}">
-                <a16:creationId xmlns:a16="http://schemas.microsoft.com/office/drawing/2014/main" id="{5FB7A15F-8008-3358-C86F-F44BECEF96B2}"/>
+          <p:cNvPr id="11" name="Imagen 10">
+            <a:extLst>
+              <a:ext uri="{FF2B5EF4-FFF2-40B4-BE49-F238E27FC236}">
+                <a16:creationId xmlns:a16="http://schemas.microsoft.com/office/drawing/2014/main" id="{CC4DF990-158C-D62F-7833-DC8935DC03FE}"/>
               </a:ext>
             </a:extLst>
           </p:cNvPr>
@@ -3734,7 +3734,7 @@
         <p:spPr>
           <a:xfrm>
             <a:off x="0" y="0"/>
-            <a:ext cx="12192000" cy="6858000"/>
+            <a:ext cx="12192000" cy="6857999"/>
           </a:xfrm>
           <a:prstGeom prst="rect">
             <a:avLst/>
@@ -3764,7 +3764,7 @@
           <a:p>
             <a:fld id="{24900A51-99EC-4413-B4C1-74AB45D533CF}" type="datetime1">
               <a:rPr lang="LID4096" smtClean="0"/>
-              <a:t>03/20/2026</a:t>
+              <a:t>04/13/2026</a:t>
             </a:fld>
             <a:endParaRPr lang="LID4096"/>
           </a:p>
@@ -3914,6 +3914,90 @@
               </a:rPr>
               <a:t>Incluir el nombre de todos los autores, junto con sus respectivas instituciones, correos electrónicos institucionales y cualquier otra información de contacto relevante.</a:t>
             </a:r>
+          </a:p>
+        </p:txBody>
+      </p:sp>
+      <p:sp>
+        <p:nvSpPr>
+          <p:cNvPr id="12" name="CuadroTexto 11">
+            <a:extLst>
+              <a:ext uri="{FF2B5EF4-FFF2-40B4-BE49-F238E27FC236}">
+                <a16:creationId xmlns:a16="http://schemas.microsoft.com/office/drawing/2014/main" id="{96263A09-B789-4C57-F7BA-9523DD832632}"/>
+              </a:ext>
+            </a:extLst>
+          </p:cNvPr>
+          <p:cNvSpPr txBox="1"/>
+          <p:nvPr/>
+        </p:nvSpPr>
+        <p:spPr>
+          <a:xfrm>
+            <a:off x="3857625" y="177718"/>
+            <a:ext cx="7824327" cy="1323439"/>
+          </a:xfrm>
+          <a:prstGeom prst="rect">
+            <a:avLst/>
+          </a:prstGeom>
+          <a:noFill/>
+        </p:spPr>
+        <p:txBody>
+          <a:bodyPr wrap="square">
+            <a:spAutoFit/>
+          </a:bodyPr>
+          <a:lstStyle/>
+          <a:p>
+            <a:pPr algn="l"/>
+            <a:r>
+              <a:rPr lang="es-MX" sz="2000" b="1" i="0" dirty="0">
+                <a:solidFill>
+                  <a:srgbClr val="C00000"/>
+                </a:solidFill>
+                <a:effectLst/>
+                <a:latin typeface="UTECtxt Black"/>
+              </a:rPr>
+              <a:t>Apreciado autor: </a:t>
+            </a:r>
+          </a:p>
+          <a:p>
+            <a:pPr algn="l"/>
+            <a:r>
+              <a:rPr lang="es-MX" sz="2000" dirty="0">
+                <a:solidFill>
+                  <a:srgbClr val="C00000"/>
+                </a:solidFill>
+                <a:latin typeface="UTECtxt Black"/>
+              </a:rPr>
+              <a:t>U</a:t>
+            </a:r>
+            <a:r>
+              <a:rPr lang="es-MX" sz="2000" i="0" dirty="0">
+                <a:solidFill>
+                  <a:srgbClr val="C00000"/>
+                </a:solidFill>
+                <a:effectLst/>
+                <a:latin typeface="UTECtxt Black"/>
+              </a:rPr>
+              <a:t>sted es libre de editar el contenido de esta presentación, manteniendo el formato de fondo y los estilos de color y tamaño de fuente.</a:t>
+            </a:r>
+          </a:p>
+          <a:p>
+            <a:pPr algn="l"/>
+            <a:r>
+              <a:rPr lang="es-MX" sz="2000" i="0" dirty="0">
+                <a:solidFill>
+                  <a:srgbClr val="C00000"/>
+                </a:solidFill>
+                <a:effectLst/>
+                <a:latin typeface="UTECtxt Black"/>
+              </a:rPr>
+              <a:t>(Este mensaje puede borrarse después de ser leído)</a:t>
+            </a:r>
+            <a:endParaRPr lang="es-419" sz="2000" i="0" dirty="0">
+              <a:solidFill>
+                <a:srgbClr val="C00000"/>
+              </a:solidFill>
+              <a:effectLst/>
+              <a:latin typeface="UTECtxt Black"/>
+            </a:endParaRPr>
           </a:p>
         </p:txBody>
       </p:sp>
@@ -3949,10 +4033,10 @@
       </p:grpSpPr>
       <p:pic>
         <p:nvPicPr>
-          <p:cNvPr id="5" name="Imagen 4">
-            <a:extLst>
-              <a:ext uri="{FF2B5EF4-FFF2-40B4-BE49-F238E27FC236}">
-                <a16:creationId xmlns:a16="http://schemas.microsoft.com/office/drawing/2014/main" id="{2F3DF8F4-A587-23D0-949B-8DD4D501CE21}"/>
+          <p:cNvPr id="4" name="Imagen 3">
+            <a:extLst>
+              <a:ext uri="{FF2B5EF4-FFF2-40B4-BE49-F238E27FC236}">
+                <a16:creationId xmlns:a16="http://schemas.microsoft.com/office/drawing/2014/main" id="{1EC90072-4421-5182-B8A1-E700B4ADD701}"/>
               </a:ext>
             </a:extLst>
           </p:cNvPr>
@@ -3970,7 +4054,7 @@
         <p:spPr>
           <a:xfrm>
             <a:off x="0" y="0"/>
-            <a:ext cx="12192000" cy="6858000"/>
+            <a:ext cx="12192000" cy="6857999"/>
           </a:xfrm>
           <a:prstGeom prst="rect">
             <a:avLst/>
@@ -4000,7 +4084,7 @@
           <a:p>
             <a:fld id="{071D6CF1-D465-4390-8C07-B57F4CE21340}" type="datetime1">
               <a:rPr lang="LID4096" smtClean="0"/>
-              <a:t>03/20/2026</a:t>
+              <a:t>04/13/2026</a:t>
             </a:fld>
             <a:endParaRPr lang="LID4096"/>
           </a:p>
@@ -4129,10 +4213,10 @@
       </p:grpSpPr>
       <p:pic>
         <p:nvPicPr>
-          <p:cNvPr id="10" name="Imagen 9">
-            <a:extLst>
-              <a:ext uri="{FF2B5EF4-FFF2-40B4-BE49-F238E27FC236}">
-                <a16:creationId xmlns:a16="http://schemas.microsoft.com/office/drawing/2014/main" id="{0A98C5BC-2F8E-3DCB-FF46-33634FF2C28E}"/>
+          <p:cNvPr id="5" name="Imagen 4">
+            <a:extLst>
+              <a:ext uri="{FF2B5EF4-FFF2-40B4-BE49-F238E27FC236}">
+                <a16:creationId xmlns:a16="http://schemas.microsoft.com/office/drawing/2014/main" id="{47D087E1-F3AE-B9C8-BD8B-FADFB7FBA238}"/>
               </a:ext>
             </a:extLst>
           </p:cNvPr>
@@ -4180,7 +4264,7 @@
           <a:p>
             <a:fld id="{24900A51-99EC-4413-B4C1-74AB45D533CF}" type="datetime1">
               <a:rPr lang="LID4096" smtClean="0"/>
-              <a:t>03/20/2026</a:t>
+              <a:t>04/13/2026</a:t>
             </a:fld>
             <a:endParaRPr lang="LID4096"/>
           </a:p>
@@ -4309,10 +4393,10 @@
       </p:grpSpPr>
       <p:pic>
         <p:nvPicPr>
-          <p:cNvPr id="13" name="Imagen 12">
-            <a:extLst>
-              <a:ext uri="{FF2B5EF4-FFF2-40B4-BE49-F238E27FC236}">
-                <a16:creationId xmlns:a16="http://schemas.microsoft.com/office/drawing/2014/main" id="{0F153EE0-64E2-E5F6-8763-746309D153D9}"/>
+          <p:cNvPr id="21" name="Imagen 20">
+            <a:extLst>
+              <a:ext uri="{FF2B5EF4-FFF2-40B4-BE49-F238E27FC236}">
+                <a16:creationId xmlns:a16="http://schemas.microsoft.com/office/drawing/2014/main" id="{5B73BC43-5173-F5CD-3B77-BC34A66964C8}"/>
               </a:ext>
             </a:extLst>
           </p:cNvPr>
@@ -4330,7 +4414,7 @@
         <p:spPr>
           <a:xfrm>
             <a:off x="0" y="0"/>
-            <a:ext cx="12192000" cy="6858000"/>
+            <a:ext cx="12192000" cy="6857999"/>
           </a:xfrm>
           <a:prstGeom prst="rect">
             <a:avLst/>
@@ -4360,7 +4444,7 @@
           <a:p>
             <a:fld id="{071D6CF1-D465-4390-8C07-B57F4CE21340}" type="datetime1">
               <a:rPr lang="LID4096" smtClean="0"/>
-              <a:t>03/20/2026</a:t>
+              <a:t>04/13/2026</a:t>
             </a:fld>
             <a:endParaRPr lang="LID4096"/>
           </a:p>
@@ -4822,10 +4906,10 @@
       </p:grpSpPr>
       <p:pic>
         <p:nvPicPr>
-          <p:cNvPr id="8" name="Imagen 7">
-            <a:extLst>
-              <a:ext uri="{FF2B5EF4-FFF2-40B4-BE49-F238E27FC236}">
-                <a16:creationId xmlns:a16="http://schemas.microsoft.com/office/drawing/2014/main" id="{962C74C0-32BB-FD42-FAB5-56ABF23C7C98}"/>
+          <p:cNvPr id="13" name="Imagen 12">
+            <a:extLst>
+              <a:ext uri="{FF2B5EF4-FFF2-40B4-BE49-F238E27FC236}">
+                <a16:creationId xmlns:a16="http://schemas.microsoft.com/office/drawing/2014/main" id="{233CCF15-BF8F-607E-BFE3-627F4F9D2893}"/>
               </a:ext>
             </a:extLst>
           </p:cNvPr>
@@ -4843,7 +4927,7 @@
         <p:spPr>
           <a:xfrm>
             <a:off x="0" y="0"/>
-            <a:ext cx="12192000" cy="6858000"/>
+            <a:ext cx="12192000" cy="6857999"/>
           </a:xfrm>
           <a:prstGeom prst="rect">
             <a:avLst/>
@@ -4873,7 +4957,7 @@
           <a:p>
             <a:fld id="{071D6CF1-D465-4390-8C07-B57F4CE21340}" type="datetime1">
               <a:rPr lang="LID4096" smtClean="0"/>
-              <a:t>03/20/2026</a:t>
+              <a:t>04/13/2026</a:t>
             </a:fld>
             <a:endParaRPr lang="LID4096"/>
           </a:p>
@@ -5725,10 +5809,10 @@
       </p:grpSpPr>
       <p:pic>
         <p:nvPicPr>
-          <p:cNvPr id="4" name="Imagen 3">
-            <a:extLst>
-              <a:ext uri="{FF2B5EF4-FFF2-40B4-BE49-F238E27FC236}">
-                <a16:creationId xmlns:a16="http://schemas.microsoft.com/office/drawing/2014/main" id="{E23993FD-6D93-4759-C25E-BB0D0FF20937}"/>
+          <p:cNvPr id="5" name="Imagen 4">
+            <a:extLst>
+              <a:ext uri="{FF2B5EF4-FFF2-40B4-BE49-F238E27FC236}">
+                <a16:creationId xmlns:a16="http://schemas.microsoft.com/office/drawing/2014/main" id="{AE95595A-98A3-55BD-954F-CE524B557B77}"/>
               </a:ext>
             </a:extLst>
           </p:cNvPr>
@@ -5746,7 +5830,7 @@
         <p:spPr>
           <a:xfrm>
             <a:off x="0" y="0"/>
-            <a:ext cx="12192000" cy="6858000"/>
+            <a:ext cx="12192000" cy="6857999"/>
           </a:xfrm>
           <a:prstGeom prst="rect">
             <a:avLst/>
@@ -5776,7 +5860,7 @@
           <a:p>
             <a:fld id="{071D6CF1-D465-4390-8C07-B57F4CE21340}" type="datetime1">
               <a:rPr lang="LID4096" smtClean="0"/>
-              <a:t>03/20/2026</a:t>
+              <a:t>04/13/2026</a:t>
             </a:fld>
             <a:endParaRPr lang="LID4096"/>
           </a:p>
@@ -5908,10 +5992,10 @@
       </p:grpSpPr>
       <p:pic>
         <p:nvPicPr>
-          <p:cNvPr id="5" name="Imagen 4">
-            <a:extLst>
-              <a:ext uri="{FF2B5EF4-FFF2-40B4-BE49-F238E27FC236}">
-                <a16:creationId xmlns:a16="http://schemas.microsoft.com/office/drawing/2014/main" id="{5F51F7DE-7DE1-C9A2-64D3-A1A900DD13B0}"/>
+          <p:cNvPr id="4" name="Imagen 3">
+            <a:extLst>
+              <a:ext uri="{FF2B5EF4-FFF2-40B4-BE49-F238E27FC236}">
+                <a16:creationId xmlns:a16="http://schemas.microsoft.com/office/drawing/2014/main" id="{1D4E1D4F-A8CA-186A-2CEE-5EE1DD5A2BAF}"/>
               </a:ext>
             </a:extLst>
           </p:cNvPr>
@@ -5929,7 +6013,7 @@
         <p:spPr>
           <a:xfrm>
             <a:off x="0" y="0"/>
-            <a:ext cx="12192000" cy="6858000"/>
+            <a:ext cx="12192000" cy="6857999"/>
           </a:xfrm>
           <a:prstGeom prst="rect">
             <a:avLst/>
@@ -5959,7 +6043,7 @@
           <a:p>
             <a:fld id="{071D6CF1-D465-4390-8C07-B57F4CE21340}" type="datetime1">
               <a:rPr lang="LID4096" smtClean="0"/>
-              <a:t>03/20/2026</a:t>
+              <a:t>04/13/2026</a:t>
             </a:fld>
             <a:endParaRPr lang="LID4096"/>
           </a:p>
@@ -6124,10 +6208,10 @@
       </p:grpSpPr>
       <p:pic>
         <p:nvPicPr>
-          <p:cNvPr id="5" name="Imagen 4">
-            <a:extLst>
-              <a:ext uri="{FF2B5EF4-FFF2-40B4-BE49-F238E27FC236}">
-                <a16:creationId xmlns:a16="http://schemas.microsoft.com/office/drawing/2014/main" id="{A465AAEB-4A58-72E8-B6D1-6F3F302F436C}"/>
+          <p:cNvPr id="4" name="Imagen 3">
+            <a:extLst>
+              <a:ext uri="{FF2B5EF4-FFF2-40B4-BE49-F238E27FC236}">
+                <a16:creationId xmlns:a16="http://schemas.microsoft.com/office/drawing/2014/main" id="{0D4E7FE7-4341-5578-8A65-BCC55FAD1BFB}"/>
               </a:ext>
             </a:extLst>
           </p:cNvPr>
@@ -6145,7 +6229,7 @@
         <p:spPr>
           <a:xfrm>
             <a:off x="0" y="0"/>
-            <a:ext cx="12192000" cy="6858000"/>
+            <a:ext cx="12192000" cy="6857999"/>
           </a:xfrm>
           <a:prstGeom prst="rect">
             <a:avLst/>
@@ -6175,7 +6259,7 @@
           <a:p>
             <a:fld id="{071D6CF1-D465-4390-8C07-B57F4CE21340}" type="datetime1">
               <a:rPr lang="LID4096" smtClean="0"/>
-              <a:t>03/20/2026</a:t>
+              <a:t>04/13/2026</a:t>
             </a:fld>
             <a:endParaRPr lang="LID4096"/>
           </a:p>
@@ -6328,10 +6412,10 @@
       </p:grpSpPr>
       <p:pic>
         <p:nvPicPr>
-          <p:cNvPr id="5" name="Imagen 4">
-            <a:extLst>
-              <a:ext uri="{FF2B5EF4-FFF2-40B4-BE49-F238E27FC236}">
-                <a16:creationId xmlns:a16="http://schemas.microsoft.com/office/drawing/2014/main" id="{4E446551-3FA3-49CC-C807-89404D77EFA6}"/>
+          <p:cNvPr id="4" name="Imagen 3">
+            <a:extLst>
+              <a:ext uri="{FF2B5EF4-FFF2-40B4-BE49-F238E27FC236}">
+                <a16:creationId xmlns:a16="http://schemas.microsoft.com/office/drawing/2014/main" id="{022B1E32-8780-FEB4-7426-0EC71994850A}"/>
               </a:ext>
             </a:extLst>
           </p:cNvPr>
@@ -6349,7 +6433,7 @@
         <p:spPr>
           <a:xfrm>
             <a:off x="0" y="0"/>
-            <a:ext cx="12192000" cy="6858000"/>
+            <a:ext cx="12192000" cy="6857999"/>
           </a:xfrm>
           <a:prstGeom prst="rect">
             <a:avLst/>
@@ -6379,7 +6463,7 @@
           <a:p>
             <a:fld id="{071D6CF1-D465-4390-8C07-B57F4CE21340}" type="datetime1">
               <a:rPr lang="LID4096" smtClean="0"/>
-              <a:t>03/20/2026</a:t>
+              <a:t>04/13/2026</a:t>
             </a:fld>
             <a:endParaRPr lang="LID4096"/>
           </a:p>
@@ -6529,10 +6613,10 @@
       </p:grpSpPr>
       <p:pic>
         <p:nvPicPr>
-          <p:cNvPr id="5" name="Imagen 4">
-            <a:extLst>
-              <a:ext uri="{FF2B5EF4-FFF2-40B4-BE49-F238E27FC236}">
-                <a16:creationId xmlns:a16="http://schemas.microsoft.com/office/drawing/2014/main" id="{4D9C6B25-B043-8AA3-AEC1-7622252BEB59}"/>
+          <p:cNvPr id="4" name="Imagen 3">
+            <a:extLst>
+              <a:ext uri="{FF2B5EF4-FFF2-40B4-BE49-F238E27FC236}">
+                <a16:creationId xmlns:a16="http://schemas.microsoft.com/office/drawing/2014/main" id="{8B028211-CBF0-DBD3-B02F-5EA164C768D9}"/>
               </a:ext>
             </a:extLst>
           </p:cNvPr>
@@ -6550,7 +6634,7 @@
         <p:spPr>
           <a:xfrm>
             <a:off x="0" y="0"/>
-            <a:ext cx="12192000" cy="6858000"/>
+            <a:ext cx="12192000" cy="6857999"/>
           </a:xfrm>
           <a:prstGeom prst="rect">
             <a:avLst/>
@@ -6580,7 +6664,7 @@
           <a:p>
             <a:fld id="{071D6CF1-D465-4390-8C07-B57F4CE21340}" type="datetime1">
               <a:rPr lang="LID4096" smtClean="0"/>
-              <a:t>03/20/2026</a:t>
+              <a:t>04/13/2026</a:t>
             </a:fld>
             <a:endParaRPr lang="LID4096"/>
           </a:p>
@@ -6733,10 +6817,10 @@
       </p:grpSpPr>
       <p:pic>
         <p:nvPicPr>
-          <p:cNvPr id="5" name="Imagen 4">
-            <a:extLst>
-              <a:ext uri="{FF2B5EF4-FFF2-40B4-BE49-F238E27FC236}">
-                <a16:creationId xmlns:a16="http://schemas.microsoft.com/office/drawing/2014/main" id="{682513A7-86B5-EBBA-EF92-E4C99E826C98}"/>
+          <p:cNvPr id="4" name="Imagen 3">
+            <a:extLst>
+              <a:ext uri="{FF2B5EF4-FFF2-40B4-BE49-F238E27FC236}">
+                <a16:creationId xmlns:a16="http://schemas.microsoft.com/office/drawing/2014/main" id="{1D75C50F-1B2D-0350-C243-5AD9251691A4}"/>
               </a:ext>
             </a:extLst>
           </p:cNvPr>
@@ -6754,7 +6838,7 @@
         <p:spPr>
           <a:xfrm>
             <a:off x="0" y="0"/>
-            <a:ext cx="12192000" cy="6858000"/>
+            <a:ext cx="12192000" cy="6857999"/>
           </a:xfrm>
           <a:prstGeom prst="rect">
             <a:avLst/>
@@ -6784,7 +6868,7 @@
           <a:p>
             <a:fld id="{071D6CF1-D465-4390-8C07-B57F4CE21340}" type="datetime1">
               <a:rPr lang="LID4096" smtClean="0"/>
-              <a:t>03/20/2026</a:t>
+              <a:t>04/13/2026</a:t>
             </a:fld>
             <a:endParaRPr lang="LID4096"/>
           </a:p>
@@ -7546,12 +7630,6 @@
 </file>
 
 <file path=customXml/item1.xml><?xml version="1.0" encoding="utf-8"?>
-<p:properties xmlns:p="http://schemas.microsoft.com/office/2006/metadata/properties" xmlns:xsi="http://www.w3.org/2001/XMLSchema-instance" xmlns:pc="http://schemas.microsoft.com/office/infopath/2007/PartnerControls">
-  <documentManagement/>
-</p:properties>
-</file>
-
-<file path=customXml/item2.xml><?xml version="1.0" encoding="utf-8"?>
 <ct:contentTypeSchema xmlns:ct="http://schemas.microsoft.com/office/2006/metadata/contentType" xmlns:ma="http://schemas.microsoft.com/office/2006/metadata/properties/metaAttributes" ct:_="" ma:_="" ma:contentTypeName="Document" ma:contentTypeID="0x01010023F8B217EB3BBA47A565926AA8C7987D" ma:contentTypeVersion="4" ma:contentTypeDescription="Create a new document." ma:contentTypeScope="" ma:versionID="7ec4e4e9d386c585f62dfc6387f1e6fc">
   <xsd:schema xmlns:xsd="http://www.w3.org/2001/XMLSchema" xmlns:xs="http://www.w3.org/2001/XMLSchema" xmlns:p="http://schemas.microsoft.com/office/2006/metadata/properties" xmlns:ns3="cf7bb671-8198-4b47-b509-909fc9b35554" targetNamespace="http://schemas.microsoft.com/office/2006/metadata/properties" ma:root="true" ma:fieldsID="1dfda49997bf404ac9fff91666b685ec" ns3:_="">
     <xsd:import namespace="cf7bb671-8198-4b47-b509-909fc9b35554"/>
@@ -7695,6 +7773,12 @@
 </ct:contentTypeSchema>
 </file>
 
+<file path=customXml/item2.xml><?xml version="1.0" encoding="utf-8"?>
+<p:properties xmlns:p="http://schemas.microsoft.com/office/2006/metadata/properties" xmlns:xsi="http://www.w3.org/2001/XMLSchema-instance" xmlns:pc="http://schemas.microsoft.com/office/infopath/2007/PartnerControls">
+  <documentManagement/>
+</p:properties>
+</file>
+
 <file path=customXml/item3.xml><?xml version="1.0" encoding="utf-8"?>
 <?mso-contentType ?>
 <FormTemplates xmlns="http://schemas.microsoft.com/sharepoint/v3/contenttype/forms">
@@ -7705,22 +7789,6 @@
 </file>
 
 <file path=customXml/itemProps1.xml><?xml version="1.0" encoding="utf-8"?>
-<ds:datastoreItem xmlns:ds="http://schemas.openxmlformats.org/officeDocument/2006/customXml" ds:itemID="{42A1DC64-95E9-4D2E-AD5F-8506117781A3}">
-  <ds:schemaRefs>
-    <ds:schemaRef ds:uri="http://purl.org/dc/elements/1.1/"/>
-    <ds:schemaRef ds:uri="http://www.w3.org/XML/1998/namespace"/>
-    <ds:schemaRef ds:uri="http://purl.org/dc/terms/"/>
-    <ds:schemaRef ds:uri="http://schemas.microsoft.com/office/2006/documentManagement/types"/>
-    <ds:schemaRef ds:uri="http://purl.org/dc/dcmitype/"/>
-    <ds:schemaRef ds:uri="cf7bb671-8198-4b47-b509-909fc9b35554"/>
-    <ds:schemaRef ds:uri="http://schemas.microsoft.com/office/infopath/2007/PartnerControls"/>
-    <ds:schemaRef ds:uri="http://schemas.openxmlformats.org/package/2006/metadata/core-properties"/>
-    <ds:schemaRef ds:uri="http://schemas.microsoft.com/office/2006/metadata/properties"/>
-  </ds:schemaRefs>
-</ds:datastoreItem>
-</file>
-
-<file path=customXml/itemProps2.xml><?xml version="1.0" encoding="utf-8"?>
 <ds:datastoreItem xmlns:ds="http://schemas.openxmlformats.org/officeDocument/2006/customXml" ds:itemID="{895BF907-245E-438D-8D65-246C5769B629}">
   <ds:schemaRefs>
     <ds:schemaRef ds:uri="http://schemas.microsoft.com/office/2006/metadata/contentType"/>
@@ -7738,6 +7806,22 @@
 </ds:datastoreItem>
 </file>
 
+<file path=customXml/itemProps2.xml><?xml version="1.0" encoding="utf-8"?>
+<ds:datastoreItem xmlns:ds="http://schemas.openxmlformats.org/officeDocument/2006/customXml" ds:itemID="{42A1DC64-95E9-4D2E-AD5F-8506117781A3}">
+  <ds:schemaRefs>
+    <ds:schemaRef ds:uri="http://purl.org/dc/elements/1.1/"/>
+    <ds:schemaRef ds:uri="http://www.w3.org/XML/1998/namespace"/>
+    <ds:schemaRef ds:uri="http://purl.org/dc/terms/"/>
+    <ds:schemaRef ds:uri="http://schemas.microsoft.com/office/2006/documentManagement/types"/>
+    <ds:schemaRef ds:uri="http://purl.org/dc/dcmitype/"/>
+    <ds:schemaRef ds:uri="cf7bb671-8198-4b47-b509-909fc9b35554"/>
+    <ds:schemaRef ds:uri="http://schemas.microsoft.com/office/infopath/2007/PartnerControls"/>
+    <ds:schemaRef ds:uri="http://schemas.openxmlformats.org/package/2006/metadata/core-properties"/>
+    <ds:schemaRef ds:uri="http://schemas.microsoft.com/office/2006/metadata/properties"/>
+  </ds:schemaRefs>
+</ds:datastoreItem>
+</file>
+
 <file path=customXml/itemProps3.xml><?xml version="1.0" encoding="utf-8"?>
 <ds:datastoreItem xmlns:ds="http://schemas.openxmlformats.org/officeDocument/2006/customXml" ds:itemID="{A60DCBB8-C4CC-4EDA-846E-130F7C4B50BF}">
   <ds:schemaRefs>
